--- a/project_4b/4c_Reflection_Questions.pptx
+++ b/project_4b/4c_Reflection_Questions.pptx
@@ -118,6 +118,166 @@
 </p:presentation>
 </file>
 
+<file path=ppt/revisionInfo.xml><?xml version="1.0" encoding="utf-8"?>
+<p1510:revInfo xmlns:a="http://schemas.openxmlformats.org/drawingml/2006/main" xmlns:r="http://schemas.openxmlformats.org/officeDocument/2006/relationships" xmlns:p1510="http://schemas.microsoft.com/office/powerpoint/2015/10/main">
+  <p1510:revLst>
+    <p1510:client id="{36456EC6-0BBE-0149-B47B-82C0A6C14C41}" v="8" dt="2026-04-24T03:42:39.803"/>
+  </p1510:revLst>
+</p1510:revInfo>
+</file>
+
+<file path=ppt/changesInfos/changesInfo1.xml><?xml version="1.0" encoding="utf-8"?>
+<pc:chgInfo xmlns:a="http://schemas.openxmlformats.org/drawingml/2006/main" xmlns:r="http://schemas.openxmlformats.org/officeDocument/2006/relationships" xmlns:ac="http://schemas.microsoft.com/office/drawing/2013/main/command" xmlns:pc="http://schemas.microsoft.com/office/powerpoint/2013/main/command">
+  <pc:docChgLst>
+    <pc:chgData name="Mediratta, Ojas" userId="0b414c54-38e7-421b-b6da-e3c6c1dcc7a6" providerId="ADAL" clId="{DF7E4C28-C197-5838-9C8F-6DD81E6275B3}"/>
+    <pc:docChg chg="custSel modSld">
+      <pc:chgData name="Mediratta, Ojas" userId="0b414c54-38e7-421b-b6da-e3c6c1dcc7a6" providerId="ADAL" clId="{DF7E4C28-C197-5838-9C8F-6DD81E6275B3}" dt="2026-04-24T03:42:53.718" v="144" actId="20577"/>
+      <pc:docMkLst>
+        <pc:docMk/>
+      </pc:docMkLst>
+      <pc:sldChg chg="modSp mod">
+        <pc:chgData name="Mediratta, Ojas" userId="0b414c54-38e7-421b-b6da-e3c6c1dcc7a6" providerId="ADAL" clId="{DF7E4C28-C197-5838-9C8F-6DD81E6275B3}" dt="2026-04-24T02:48:57.672" v="51" actId="20577"/>
+        <pc:sldMkLst>
+          <pc:docMk/>
+          <pc:sldMk cId="3651844019" sldId="256"/>
+        </pc:sldMkLst>
+        <pc:spChg chg="mod">
+          <ac:chgData name="Mediratta, Ojas" userId="0b414c54-38e7-421b-b6da-e3c6c1dcc7a6" providerId="ADAL" clId="{DF7E4C28-C197-5838-9C8F-6DD81E6275B3}" dt="2026-04-24T02:48:57.672" v="51" actId="20577"/>
+          <ac:spMkLst>
+            <pc:docMk/>
+            <pc:sldMk cId="3651844019" sldId="256"/>
+            <ac:spMk id="3" creationId="{498E9311-0349-FD8A-5F59-792F3D35D5E2}"/>
+          </ac:spMkLst>
+        </pc:spChg>
+      </pc:sldChg>
+      <pc:sldChg chg="addSp delSp modSp mod">
+        <pc:chgData name="Mediratta, Ojas" userId="0b414c54-38e7-421b-b6da-e3c6c1dcc7a6" providerId="ADAL" clId="{DF7E4C28-C197-5838-9C8F-6DD81E6275B3}" dt="2026-04-24T03:33:58.857" v="93" actId="1076"/>
+        <pc:sldMkLst>
+          <pc:docMk/>
+          <pc:sldMk cId="3031350474" sldId="257"/>
+        </pc:sldMkLst>
+        <pc:spChg chg="mod">
+          <ac:chgData name="Mediratta, Ojas" userId="0b414c54-38e7-421b-b6da-e3c6c1dcc7a6" providerId="ADAL" clId="{DF7E4C28-C197-5838-9C8F-6DD81E6275B3}" dt="2026-04-24T03:33:52.206" v="89" actId="27636"/>
+          <ac:spMkLst>
+            <pc:docMk/>
+            <pc:sldMk cId="3031350474" sldId="257"/>
+            <ac:spMk id="3" creationId="{341FF121-F908-E1F5-76C6-CEA0FFCE26C1}"/>
+          </ac:spMkLst>
+        </pc:spChg>
+        <pc:spChg chg="del">
+          <ac:chgData name="Mediratta, Ojas" userId="0b414c54-38e7-421b-b6da-e3c6c1dcc7a6" providerId="ADAL" clId="{DF7E4C28-C197-5838-9C8F-6DD81E6275B3}" dt="2026-04-24T03:32:36.051" v="68" actId="478"/>
+          <ac:spMkLst>
+            <pc:docMk/>
+            <pc:sldMk cId="3031350474" sldId="257"/>
+            <ac:spMk id="4" creationId="{88B5760F-136C-22A8-41F2-45ADE3BD0EAD}"/>
+          </ac:spMkLst>
+        </pc:spChg>
+        <pc:picChg chg="add mod">
+          <ac:chgData name="Mediratta, Ojas" userId="0b414c54-38e7-421b-b6da-e3c6c1dcc7a6" providerId="ADAL" clId="{DF7E4C28-C197-5838-9C8F-6DD81E6275B3}" dt="2026-04-24T03:33:58.857" v="93" actId="1076"/>
+          <ac:picMkLst>
+            <pc:docMk/>
+            <pc:sldMk cId="3031350474" sldId="257"/>
+            <ac:picMk id="5" creationId="{FA58FD3C-6B90-124D-B76B-DDB90214B8C3}"/>
+          </ac:picMkLst>
+        </pc:picChg>
+      </pc:sldChg>
+      <pc:sldChg chg="modSp mod">
+        <pc:chgData name="Mediratta, Ojas" userId="0b414c54-38e7-421b-b6da-e3c6c1dcc7a6" providerId="ADAL" clId="{DF7E4C28-C197-5838-9C8F-6DD81E6275B3}" dt="2026-04-24T02:50:30.894" v="56" actId="114"/>
+        <pc:sldMkLst>
+          <pc:docMk/>
+          <pc:sldMk cId="448509744" sldId="263"/>
+        </pc:sldMkLst>
+        <pc:spChg chg="mod">
+          <ac:chgData name="Mediratta, Ojas" userId="0b414c54-38e7-421b-b6da-e3c6c1dcc7a6" providerId="ADAL" clId="{DF7E4C28-C197-5838-9C8F-6DD81E6275B3}" dt="2026-04-24T02:50:30.894" v="56" actId="114"/>
+          <ac:spMkLst>
+            <pc:docMk/>
+            <pc:sldMk cId="448509744" sldId="263"/>
+            <ac:spMk id="4" creationId="{6ED0A962-2D78-07E9-DB9E-7071997E3491}"/>
+          </ac:spMkLst>
+        </pc:spChg>
+      </pc:sldChg>
+      <pc:sldChg chg="addSp delSp modSp mod">
+        <pc:chgData name="Mediratta, Ojas" userId="0b414c54-38e7-421b-b6da-e3c6c1dcc7a6" providerId="ADAL" clId="{DF7E4C28-C197-5838-9C8F-6DD81E6275B3}" dt="2026-04-24T03:38:44.554" v="128" actId="27636"/>
+        <pc:sldMkLst>
+          <pc:docMk/>
+          <pc:sldMk cId="1351392675" sldId="266"/>
+        </pc:sldMkLst>
+        <pc:spChg chg="mod">
+          <ac:chgData name="Mediratta, Ojas" userId="0b414c54-38e7-421b-b6da-e3c6c1dcc7a6" providerId="ADAL" clId="{DF7E4C28-C197-5838-9C8F-6DD81E6275B3}" dt="2026-04-24T03:38:44.554" v="128" actId="27636"/>
+          <ac:spMkLst>
+            <pc:docMk/>
+            <pc:sldMk cId="1351392675" sldId="266"/>
+            <ac:spMk id="9" creationId="{9932BD16-1E0D-FD0B-E369-97E8D13EB903}"/>
+          </ac:spMkLst>
+        </pc:spChg>
+        <pc:spChg chg="del">
+          <ac:chgData name="Mediratta, Ojas" userId="0b414c54-38e7-421b-b6da-e3c6c1dcc7a6" providerId="ADAL" clId="{DF7E4C28-C197-5838-9C8F-6DD81E6275B3}" dt="2026-04-24T03:33:12.607" v="72" actId="478"/>
+          <ac:spMkLst>
+            <pc:docMk/>
+            <pc:sldMk cId="1351392675" sldId="266"/>
+            <ac:spMk id="10" creationId="{C1FEAC51-4750-CB07-4065-89456C637EF5}"/>
+          </ac:spMkLst>
+        </pc:spChg>
+        <pc:picChg chg="add mod">
+          <ac:chgData name="Mediratta, Ojas" userId="0b414c54-38e7-421b-b6da-e3c6c1dcc7a6" providerId="ADAL" clId="{DF7E4C28-C197-5838-9C8F-6DD81E6275B3}" dt="2026-04-24T03:33:16.361" v="74" actId="1076"/>
+          <ac:picMkLst>
+            <pc:docMk/>
+            <pc:sldMk cId="1351392675" sldId="266"/>
+            <ac:picMk id="4" creationId="{3F67CB60-8FC3-9878-BF89-97F2210E6F36}"/>
+          </ac:picMkLst>
+        </pc:picChg>
+      </pc:sldChg>
+      <pc:sldChg chg="addSp modSp mod">
+        <pc:chgData name="Mediratta, Ojas" userId="0b414c54-38e7-421b-b6da-e3c6c1dcc7a6" providerId="ADAL" clId="{DF7E4C28-C197-5838-9C8F-6DD81E6275B3}" dt="2026-04-24T03:42:53.718" v="144" actId="20577"/>
+        <pc:sldMkLst>
+          <pc:docMk/>
+          <pc:sldMk cId="175583713" sldId="267"/>
+        </pc:sldMkLst>
+        <pc:spChg chg="mod">
+          <ac:chgData name="Mediratta, Ojas" userId="0b414c54-38e7-421b-b6da-e3c6c1dcc7a6" providerId="ADAL" clId="{DF7E4C28-C197-5838-9C8F-6DD81E6275B3}" dt="2026-04-24T03:42:53.718" v="144" actId="20577"/>
+          <ac:spMkLst>
+            <pc:docMk/>
+            <pc:sldMk cId="175583713" sldId="267"/>
+            <ac:spMk id="3" creationId="{4773AD08-6397-4F8B-3513-5231FFBDE7E5}"/>
+          </ac:spMkLst>
+        </pc:spChg>
+        <pc:spChg chg="mod">
+          <ac:chgData name="Mediratta, Ojas" userId="0b414c54-38e7-421b-b6da-e3c6c1dcc7a6" providerId="ADAL" clId="{DF7E4C28-C197-5838-9C8F-6DD81E6275B3}" dt="2026-04-24T03:36:54.954" v="120" actId="14100"/>
+          <ac:spMkLst>
+            <pc:docMk/>
+            <pc:sldMk cId="175583713" sldId="267"/>
+            <ac:spMk id="4" creationId="{67553AFD-0E65-CF76-D6B2-11BAE799E06B}"/>
+          </ac:spMkLst>
+        </pc:spChg>
+        <pc:picChg chg="add mod">
+          <ac:chgData name="Mediratta, Ojas" userId="0b414c54-38e7-421b-b6da-e3c6c1dcc7a6" providerId="ADAL" clId="{DF7E4C28-C197-5838-9C8F-6DD81E6275B3}" dt="2026-04-24T03:36:49.720" v="119" actId="1076"/>
+          <ac:picMkLst>
+            <pc:docMk/>
+            <pc:sldMk cId="175583713" sldId="267"/>
+            <ac:picMk id="6" creationId="{DA8D0CB1-2831-8DE8-4199-9380BC725DF7}"/>
+          </ac:picMkLst>
+        </pc:picChg>
+      </pc:sldChg>
+      <pc:sldChg chg="modSp mod">
+        <pc:chgData name="Mediratta, Ojas" userId="0b414c54-38e7-421b-b6da-e3c6c1dcc7a6" providerId="ADAL" clId="{DF7E4C28-C197-5838-9C8F-6DD81E6275B3}" dt="2026-04-24T02:50:57.889" v="67" actId="20577"/>
+        <pc:sldMkLst>
+          <pc:docMk/>
+          <pc:sldMk cId="3849001698" sldId="269"/>
+        </pc:sldMkLst>
+        <pc:spChg chg="mod">
+          <ac:chgData name="Mediratta, Ojas" userId="0b414c54-38e7-421b-b6da-e3c6c1dcc7a6" providerId="ADAL" clId="{DF7E4C28-C197-5838-9C8F-6DD81E6275B3}" dt="2026-04-24T02:50:57.889" v="67" actId="20577"/>
+          <ac:spMkLst>
+            <pc:docMk/>
+            <pc:sldMk cId="3849001698" sldId="269"/>
+            <ac:spMk id="4" creationId="{05994028-B14F-B7E0-6657-418CA54A3B27}"/>
+          </ac:spMkLst>
+        </pc:spChg>
+      </pc:sldChg>
+    </pc:docChg>
+  </pc:docChgLst>
+</pc:chgInfo>
+</file>
+
 <file path=ppt/slideLayouts/slideLayout1.xml><?xml version="1.0" encoding="utf-8"?>
 <p:sldLayout xmlns:a="http://schemas.openxmlformats.org/drawingml/2006/main" xmlns:r="http://schemas.openxmlformats.org/officeDocument/2006/relationships" xmlns:p="http://schemas.openxmlformats.org/presentationml/2006/main" type="title" preserve="1">
   <p:cSld name="Title Slide">
@@ -265,7 +425,7 @@
           <a:p>
             <a:fld id="{E5406C7D-96B9-4210-A821-CA0D29017C6B}" type="datetimeFigureOut">
               <a:rPr lang="en-US" smtClean="0"/>
-              <a:t>4/14/26</a:t>
+              <a:t>4/23/26</a:t>
             </a:fld>
             <a:endParaRPr lang="en-US"/>
           </a:p>
@@ -463,7 +623,7 @@
           <a:p>
             <a:fld id="{E5406C7D-96B9-4210-A821-CA0D29017C6B}" type="datetimeFigureOut">
               <a:rPr lang="en-US" smtClean="0"/>
-              <a:t>4/14/26</a:t>
+              <a:t>4/23/26</a:t>
             </a:fld>
             <a:endParaRPr lang="en-US"/>
           </a:p>
@@ -671,7 +831,7 @@
           <a:p>
             <a:fld id="{E5406C7D-96B9-4210-A821-CA0D29017C6B}" type="datetimeFigureOut">
               <a:rPr lang="en-US" smtClean="0"/>
-              <a:t>4/14/26</a:t>
+              <a:t>4/23/26</a:t>
             </a:fld>
             <a:endParaRPr lang="en-US"/>
           </a:p>
@@ -869,7 +1029,7 @@
           <a:p>
             <a:fld id="{E5406C7D-96B9-4210-A821-CA0D29017C6B}" type="datetimeFigureOut">
               <a:rPr lang="en-US" smtClean="0"/>
-              <a:t>4/14/26</a:t>
+              <a:t>4/23/26</a:t>
             </a:fld>
             <a:endParaRPr lang="en-US"/>
           </a:p>
@@ -1144,7 +1304,7 @@
           <a:p>
             <a:fld id="{E5406C7D-96B9-4210-A821-CA0D29017C6B}" type="datetimeFigureOut">
               <a:rPr lang="en-US" smtClean="0"/>
-              <a:t>4/14/26</a:t>
+              <a:t>4/23/26</a:t>
             </a:fld>
             <a:endParaRPr lang="en-US"/>
           </a:p>
@@ -1409,7 +1569,7 @@
           <a:p>
             <a:fld id="{E5406C7D-96B9-4210-A821-CA0D29017C6B}" type="datetimeFigureOut">
               <a:rPr lang="en-US" smtClean="0"/>
-              <a:t>4/14/26</a:t>
+              <a:t>4/23/26</a:t>
             </a:fld>
             <a:endParaRPr lang="en-US"/>
           </a:p>
@@ -1821,7 +1981,7 @@
           <a:p>
             <a:fld id="{E5406C7D-96B9-4210-A821-CA0D29017C6B}" type="datetimeFigureOut">
               <a:rPr lang="en-US" smtClean="0"/>
-              <a:t>4/14/26</a:t>
+              <a:t>4/23/26</a:t>
             </a:fld>
             <a:endParaRPr lang="en-US"/>
           </a:p>
@@ -1962,7 +2122,7 @@
           <a:p>
             <a:fld id="{E5406C7D-96B9-4210-A821-CA0D29017C6B}" type="datetimeFigureOut">
               <a:rPr lang="en-US" smtClean="0"/>
-              <a:t>4/14/26</a:t>
+              <a:t>4/23/26</a:t>
             </a:fld>
             <a:endParaRPr lang="en-US"/>
           </a:p>
@@ -2075,7 +2235,7 @@
           <a:p>
             <a:fld id="{E5406C7D-96B9-4210-A821-CA0D29017C6B}" type="datetimeFigureOut">
               <a:rPr lang="en-US" smtClean="0"/>
-              <a:t>4/14/26</a:t>
+              <a:t>4/23/26</a:t>
             </a:fld>
             <a:endParaRPr lang="en-US"/>
           </a:p>
@@ -2386,7 +2546,7 @@
           <a:p>
             <a:fld id="{E5406C7D-96B9-4210-A821-CA0D29017C6B}" type="datetimeFigureOut">
               <a:rPr lang="en-US" smtClean="0"/>
-              <a:t>4/14/26</a:t>
+              <a:t>4/23/26</a:t>
             </a:fld>
             <a:endParaRPr lang="en-US"/>
           </a:p>
@@ -2674,7 +2834,7 @@
           <a:p>
             <a:fld id="{E5406C7D-96B9-4210-A821-CA0D29017C6B}" type="datetimeFigureOut">
               <a:rPr lang="en-US" smtClean="0"/>
-              <a:t>4/14/26</a:t>
+              <a:t>4/23/26</a:t>
             </a:fld>
             <a:endParaRPr lang="en-US"/>
           </a:p>
@@ -2915,7 +3075,7 @@
           <a:p>
             <a:fld id="{E5406C7D-96B9-4210-A821-CA0D29017C6B}" type="datetimeFigureOut">
               <a:rPr lang="en-US" smtClean="0"/>
-              <a:t>4/14/26</a:t>
+              <a:t>4/23/26</a:t>
             </a:fld>
             <a:endParaRPr lang="en-US"/>
           </a:p>
@@ -3397,19 +3557,19 @@
           <a:p>
             <a:r>
               <a:rPr lang="en-US" sz="2800" dirty="0"/>
-              <a:t>[Name]</a:t>
+              <a:t>Ojas Mediratta</a:t>
             </a:r>
           </a:p>
           <a:p>
             <a:r>
               <a:rPr lang="en-US" sz="2800" dirty="0"/>
-              <a:t>[GT Email]</a:t>
+              <a:t>omediratta3@gatech.edu</a:t>
             </a:r>
           </a:p>
           <a:p>
             <a:r>
               <a:rPr lang="en-US" sz="2800" dirty="0"/>
-              <a:t>[GTID]</a:t>
+              <a:t>903678112</a:t>
             </a:r>
           </a:p>
         </p:txBody>
@@ -3725,8 +3885,25 @@
               <a:buNone/>
             </a:pPr>
             <a:r>
-              <a:rPr lang="en-US" sz="2400" i="1" dirty="0"/>
-              <a:t>Type answer here</a:t>
+              <a:rPr lang="en-US" i="1" dirty="0"/>
+              <a:t>IMU </a:t>
+            </a:r>
+            <a:r>
+              <a:rPr lang="en-US" i="1" dirty="0" err="1"/>
+              <a:t>preintegration</a:t>
+            </a:r>
+            <a:r>
+              <a:rPr lang="en-US" i="1" dirty="0"/>
+              <a:t> basically bundles up lots of fast IMU readings into one motion estimate between LiDAR keyframes. It keeps track of the change in orientation, velocity, and position implied by the IMU samples, plus the time gaps between them.</a:t>
+            </a:r>
+          </a:p>
+          <a:p>
+            <a:pPr marL="0" indent="0">
+              <a:buNone/>
+            </a:pPr>
+            <a:r>
+              <a:rPr lang="en-US" i="1" dirty="0"/>
+              <a:t>That helps because instead of adding a separate factor for every IMU sample, the graph only gets one compact factor per keyframe pair. So the optimization stays much smaller and faster, but we still keep most of the IMU information.</a:t>
             </a:r>
           </a:p>
         </p:txBody>
@@ -3797,15 +3974,7 @@
           <a:p>
             <a:r>
               <a:rPr lang="en-US" sz="2800" dirty="0"/>
-              <a:t>Explain the purpose of the bias-evolution factor. Why is it not enough to add only an IMU factor between consecutive states? What modeling assumption is the bias </a:t>
-            </a:r>
-            <a:r>
-              <a:rPr lang="en-US" sz="2800"/>
-              <a:t>factor capturing? </a:t>
-            </a:r>
-            <a:r>
-              <a:rPr lang="en-US" sz="2800" dirty="0"/>
-              <a:t>[5 pts]</a:t>
+              <a:t>Explain the purpose of the bias-evolution factor. Why is it not enough to add only an IMU factor between consecutive states? What modeling assumption is the bias factor capturing? [5 pts]</a:t>
             </a:r>
           </a:p>
         </p:txBody>
@@ -3842,8 +4011,17 @@
               <a:buNone/>
             </a:pPr>
             <a:r>
-              <a:rPr lang="en-US" sz="2400" i="1" dirty="0"/>
-              <a:t>Type answer here</a:t>
+              <a:rPr lang="en-US" i="1" dirty="0"/>
+              <a:t>It keeps the IMU bias from changing too wildly between keyframes. It’s basically saying the bias should stay close to the previous bias, with some noise that grows with time.</a:t>
+            </a:r>
+          </a:p>
+          <a:p>
+            <a:pPr marL="0" indent="0">
+              <a:buNone/>
+            </a:pPr>
+            <a:r>
+              <a:rPr lang="en-US" i="1" dirty="0"/>
+              <a:t>An IMU factor by itself only connects the motion states. It doesn’t explicitly model bias drift, so the optimizer can’t account for slow changes in the accelerometer and gyro offsets. The bias factor captures the assumption that bias changes gradually.</a:t>
             </a:r>
           </a:p>
         </p:txBody>
@@ -3932,6 +4110,520 @@
         <p:spPr>
           <a:xfrm>
             <a:off x="838200" y="1563158"/>
+            <a:ext cx="4125686" cy="5017256"/>
+          </a:xfrm>
+        </p:spPr>
+        <p:txBody>
+          <a:bodyPr>
+            <a:normAutofit/>
+          </a:bodyPr>
+          <a:lstStyle/>
+          <a:p>
+            <a:pPr marL="0" indent="0">
+              <a:buNone/>
+            </a:pPr>
+            <a:r>
+              <a:rPr lang="en-US" i="1" dirty="0"/>
+              <a:t>Batch re-solves the whole graph every time a new keyframe is added, so each update gets more expensive as the graph grows. ISAM2 does incremental updates, so it only adjusts the parts of the graph that changed, which keeps per-update cost close to constant.</a:t>
+            </a:r>
+            <a:br>
+              <a:rPr lang="en-US" sz="2400" i="1" dirty="0"/>
+            </a:br>
+            <a:endParaRPr lang="en-US" sz="2400" i="1" dirty="0"/>
+          </a:p>
+        </p:txBody>
+      </p:sp>
+      <p:pic>
+        <p:nvPicPr>
+          <p:cNvPr id="5" name="Picture 4">
+            <a:extLst>
+              <a:ext uri="{FF2B5EF4-FFF2-40B4-BE49-F238E27FC236}">
+                <a16:creationId xmlns:a16="http://schemas.microsoft.com/office/drawing/2014/main" id="{FA58FD3C-6B90-124D-B76B-DDB90214B8C3}"/>
+              </a:ext>
+            </a:extLst>
+          </p:cNvPr>
+          <p:cNvPicPr>
+            <a:picLocks noChangeAspect="1"/>
+          </p:cNvPicPr>
+          <p:nvPr/>
+        </p:nvPicPr>
+        <p:blipFill>
+          <a:blip r:embed="rId2"/>
+          <a:stretch>
+            <a:fillRect/>
+          </a:stretch>
+        </p:blipFill>
+        <p:spPr>
+          <a:xfrm>
+            <a:off x="5187043" y="2682204"/>
+            <a:ext cx="6825343" cy="2240643"/>
+          </a:xfrm>
+          <a:prstGeom prst="rect">
+            <a:avLst/>
+          </a:prstGeom>
+        </p:spPr>
+      </p:pic>
+    </p:spTree>
+    <p:extLst>
+      <p:ext uri="{BB962C8B-B14F-4D97-AF65-F5344CB8AC3E}">
+        <p14:creationId xmlns:p14="http://schemas.microsoft.com/office/powerpoint/2010/main" val="3031350474"/>
+      </p:ext>
+    </p:extLst>
+  </p:cSld>
+  <p:clrMapOvr>
+    <a:masterClrMapping/>
+  </p:clrMapOvr>
+</p:sld>
+</file>
+
+<file path=ppt/slides/slide5.xml><?xml version="1.0" encoding="utf-8"?>
+<p:sld xmlns:a="http://schemas.openxmlformats.org/drawingml/2006/main" xmlns:r="http://schemas.openxmlformats.org/officeDocument/2006/relationships" xmlns:p="http://schemas.openxmlformats.org/presentationml/2006/main">
+  <p:cSld>
+    <p:spTree>
+      <p:nvGrpSpPr>
+        <p:cNvPr id="1" name="">
+          <a:extLst>
+            <a:ext uri="{FF2B5EF4-FFF2-40B4-BE49-F238E27FC236}">
+              <a16:creationId xmlns:a16="http://schemas.microsoft.com/office/drawing/2014/main" id="{96020D1F-1B62-F1BD-9632-9AAD0CAD4D77}"/>
+            </a:ext>
+          </a:extLst>
+        </p:cNvPr>
+        <p:cNvGrpSpPr/>
+        <p:nvPr/>
+      </p:nvGrpSpPr>
+      <p:grpSpPr>
+        <a:xfrm>
+          <a:off x="0" y="0"/>
+          <a:ext cx="0" cy="0"/>
+          <a:chOff x="0" y="0"/>
+          <a:chExt cx="0" cy="0"/>
+        </a:xfrm>
+      </p:grpSpPr>
+      <p:sp>
+        <p:nvSpPr>
+          <p:cNvPr id="2" name="Title 1">
+            <a:extLst>
+              <a:ext uri="{FF2B5EF4-FFF2-40B4-BE49-F238E27FC236}">
+                <a16:creationId xmlns:a16="http://schemas.microsoft.com/office/drawing/2014/main" id="{AF3B030F-DC72-F3A6-F3EC-C9335BA0B578}"/>
+              </a:ext>
+            </a:extLst>
+          </p:cNvPr>
+          <p:cNvSpPr>
+            <a:spLocks noGrp="1"/>
+          </p:cNvSpPr>
+          <p:nvPr>
+            <p:ph type="title"/>
+          </p:nvPr>
+        </p:nvSpPr>
+        <p:spPr>
+          <a:xfrm>
+            <a:off x="838200" y="48683"/>
+            <a:ext cx="10515600" cy="1776942"/>
+          </a:xfrm>
+        </p:spPr>
+        <p:txBody>
+          <a:bodyPr>
+            <a:normAutofit/>
+          </a:bodyPr>
+          <a:lstStyle/>
+          <a:p>
+            <a:r>
+              <a:rPr lang="en-US" sz="2800" dirty="0"/>
+              <a:t>Paste a screenshot of your comparison of IMU </a:t>
+            </a:r>
+            <a:r>
+              <a:rPr lang="en-US" sz="2800" dirty="0" err="1"/>
+              <a:t>preintegration</a:t>
+            </a:r>
+            <a:r>
+              <a:rPr lang="en-US" sz="2800" dirty="0"/>
+              <a:t> usage and enter your ATE RMSEs. Explain why IMU </a:t>
+            </a:r>
+            <a:r>
+              <a:rPr lang="en-US" sz="2800" dirty="0" err="1"/>
+              <a:t>preintegration</a:t>
+            </a:r>
+            <a:r>
+              <a:rPr lang="en-US" sz="2800" dirty="0"/>
+              <a:t> can sometimes degrade performance. Discuss a few plausible causes *. [5 pts]</a:t>
+            </a:r>
+          </a:p>
+        </p:txBody>
+      </p:sp>
+      <p:sp>
+        <p:nvSpPr>
+          <p:cNvPr id="3" name="TextBox 2">
+            <a:extLst>
+              <a:ext uri="{FF2B5EF4-FFF2-40B4-BE49-F238E27FC236}">
+                <a16:creationId xmlns:a16="http://schemas.microsoft.com/office/drawing/2014/main" id="{FC4A03DF-A12C-6CBA-397A-1C31D0E9850C}"/>
+              </a:ext>
+            </a:extLst>
+          </p:cNvPr>
+          <p:cNvSpPr txBox="1"/>
+          <p:nvPr/>
+        </p:nvSpPr>
+        <p:spPr>
+          <a:xfrm>
+            <a:off x="734222" y="6162986"/>
+            <a:ext cx="11011422" cy="646331"/>
+          </a:xfrm>
+          <a:prstGeom prst="rect">
+            <a:avLst/>
+          </a:prstGeom>
+          <a:noFill/>
+        </p:spPr>
+        <p:txBody>
+          <a:bodyPr wrap="square" rtlCol="0">
+            <a:spAutoFit/>
+          </a:bodyPr>
+          <a:lstStyle/>
+          <a:p>
+            <a:r>
+              <a:rPr lang="en-US" dirty="0"/>
+              <a:t>* Examples of such causes could include sensor time offset, incorrect noise or bias settings, bad initialization, frame or extrinsic mismatch, or integration of biased high-rate measurements.</a:t>
+            </a:r>
+          </a:p>
+        </p:txBody>
+      </p:sp>
+      <p:sp>
+        <p:nvSpPr>
+          <p:cNvPr id="9" name="Content Placeholder 2">
+            <a:extLst>
+              <a:ext uri="{FF2B5EF4-FFF2-40B4-BE49-F238E27FC236}">
+                <a16:creationId xmlns:a16="http://schemas.microsoft.com/office/drawing/2014/main" id="{9932BD16-1E0D-FD0B-E369-97E8D13EB903}"/>
+              </a:ext>
+            </a:extLst>
+          </p:cNvPr>
+          <p:cNvSpPr txBox="1">
+            <a:spLocks/>
+          </p:cNvSpPr>
+          <p:nvPr/>
+        </p:nvSpPr>
+        <p:spPr>
+          <a:xfrm>
+            <a:off x="838200" y="1563157"/>
+            <a:ext cx="5257800" cy="4501857"/>
+          </a:xfrm>
+          <a:prstGeom prst="rect">
+            <a:avLst/>
+          </a:prstGeom>
+        </p:spPr>
+        <p:txBody>
+          <a:bodyPr vert="horz" lIns="91440" tIns="45720" rIns="91440" bIns="45720" rtlCol="0">
+            <a:normAutofit fontScale="92500" lnSpcReduction="10000"/>
+          </a:bodyPr>
+          <a:lstStyle>
+            <a:lvl1pPr marL="228600" indent="-228600" algn="l" defTabSz="914400" rtl="0" eaLnBrk="1" latinLnBrk="0" hangingPunct="1">
+              <a:lnSpc>
+                <a:spcPct val="90000"/>
+              </a:lnSpc>
+              <a:spcBef>
+                <a:spcPts val="1000"/>
+              </a:spcBef>
+              <a:buFont typeface="Arial" panose="020B0604020202020204" pitchFamily="34" charset="0"/>
+              <a:buChar char="•"/>
+              <a:defRPr sz="2800" kern="1200">
+                <a:solidFill>
+                  <a:schemeClr val="tx1"/>
+                </a:solidFill>
+                <a:latin typeface="+mn-lt"/>
+                <a:ea typeface="+mn-ea"/>
+                <a:cs typeface="+mn-cs"/>
+              </a:defRPr>
+            </a:lvl1pPr>
+            <a:lvl2pPr marL="685800" indent="-228600" algn="l" defTabSz="914400" rtl="0" eaLnBrk="1" latinLnBrk="0" hangingPunct="1">
+              <a:lnSpc>
+                <a:spcPct val="90000"/>
+              </a:lnSpc>
+              <a:spcBef>
+                <a:spcPts val="500"/>
+              </a:spcBef>
+              <a:buFont typeface="Arial" panose="020B0604020202020204" pitchFamily="34" charset="0"/>
+              <a:buChar char="•"/>
+              <a:defRPr sz="2400" kern="1200">
+                <a:solidFill>
+                  <a:schemeClr val="tx1"/>
+                </a:solidFill>
+                <a:latin typeface="+mn-lt"/>
+                <a:ea typeface="+mn-ea"/>
+                <a:cs typeface="+mn-cs"/>
+              </a:defRPr>
+            </a:lvl2pPr>
+            <a:lvl3pPr marL="1143000" indent="-228600" algn="l" defTabSz="914400" rtl="0" eaLnBrk="1" latinLnBrk="0" hangingPunct="1">
+              <a:lnSpc>
+                <a:spcPct val="90000"/>
+              </a:lnSpc>
+              <a:spcBef>
+                <a:spcPts val="500"/>
+              </a:spcBef>
+              <a:buFont typeface="Arial" panose="020B0604020202020204" pitchFamily="34" charset="0"/>
+              <a:buChar char="•"/>
+              <a:defRPr sz="2000" kern="1200">
+                <a:solidFill>
+                  <a:schemeClr val="tx1"/>
+                </a:solidFill>
+                <a:latin typeface="+mn-lt"/>
+                <a:ea typeface="+mn-ea"/>
+                <a:cs typeface="+mn-cs"/>
+              </a:defRPr>
+            </a:lvl3pPr>
+            <a:lvl4pPr marL="1600200" indent="-228600" algn="l" defTabSz="914400" rtl="0" eaLnBrk="1" latinLnBrk="0" hangingPunct="1">
+              <a:lnSpc>
+                <a:spcPct val="90000"/>
+              </a:lnSpc>
+              <a:spcBef>
+                <a:spcPts val="500"/>
+              </a:spcBef>
+              <a:buFont typeface="Arial" panose="020B0604020202020204" pitchFamily="34" charset="0"/>
+              <a:buChar char="•"/>
+              <a:defRPr sz="1800" kern="1200">
+                <a:solidFill>
+                  <a:schemeClr val="tx1"/>
+                </a:solidFill>
+                <a:latin typeface="+mn-lt"/>
+                <a:ea typeface="+mn-ea"/>
+                <a:cs typeface="+mn-cs"/>
+              </a:defRPr>
+            </a:lvl4pPr>
+            <a:lvl5pPr marL="2057400" indent="-228600" algn="l" defTabSz="914400" rtl="0" eaLnBrk="1" latinLnBrk="0" hangingPunct="1">
+              <a:lnSpc>
+                <a:spcPct val="90000"/>
+              </a:lnSpc>
+              <a:spcBef>
+                <a:spcPts val="500"/>
+              </a:spcBef>
+              <a:buFont typeface="Arial" panose="020B0604020202020204" pitchFamily="34" charset="0"/>
+              <a:buChar char="•"/>
+              <a:defRPr sz="1800" kern="1200">
+                <a:solidFill>
+                  <a:schemeClr val="tx1"/>
+                </a:solidFill>
+                <a:latin typeface="+mn-lt"/>
+                <a:ea typeface="+mn-ea"/>
+                <a:cs typeface="+mn-cs"/>
+              </a:defRPr>
+            </a:lvl5pPr>
+            <a:lvl6pPr marL="2514600" indent="-228600" algn="l" defTabSz="914400" rtl="0" eaLnBrk="1" latinLnBrk="0" hangingPunct="1">
+              <a:lnSpc>
+                <a:spcPct val="90000"/>
+              </a:lnSpc>
+              <a:spcBef>
+                <a:spcPts val="500"/>
+              </a:spcBef>
+              <a:buFont typeface="Arial" panose="020B0604020202020204" pitchFamily="34" charset="0"/>
+              <a:buChar char="•"/>
+              <a:defRPr sz="1800" kern="1200">
+                <a:solidFill>
+                  <a:schemeClr val="tx1"/>
+                </a:solidFill>
+                <a:latin typeface="+mn-lt"/>
+                <a:ea typeface="+mn-ea"/>
+                <a:cs typeface="+mn-cs"/>
+              </a:defRPr>
+            </a:lvl6pPr>
+            <a:lvl7pPr marL="2971800" indent="-228600" algn="l" defTabSz="914400" rtl="0" eaLnBrk="1" latinLnBrk="0" hangingPunct="1">
+              <a:lnSpc>
+                <a:spcPct val="90000"/>
+              </a:lnSpc>
+              <a:spcBef>
+                <a:spcPts val="500"/>
+              </a:spcBef>
+              <a:buFont typeface="Arial" panose="020B0604020202020204" pitchFamily="34" charset="0"/>
+              <a:buChar char="•"/>
+              <a:defRPr sz="1800" kern="1200">
+                <a:solidFill>
+                  <a:schemeClr val="tx1"/>
+                </a:solidFill>
+                <a:latin typeface="+mn-lt"/>
+                <a:ea typeface="+mn-ea"/>
+                <a:cs typeface="+mn-cs"/>
+              </a:defRPr>
+            </a:lvl7pPr>
+            <a:lvl8pPr marL="3429000" indent="-228600" algn="l" defTabSz="914400" rtl="0" eaLnBrk="1" latinLnBrk="0" hangingPunct="1">
+              <a:lnSpc>
+                <a:spcPct val="90000"/>
+              </a:lnSpc>
+              <a:spcBef>
+                <a:spcPts val="500"/>
+              </a:spcBef>
+              <a:buFont typeface="Arial" panose="020B0604020202020204" pitchFamily="34" charset="0"/>
+              <a:buChar char="•"/>
+              <a:defRPr sz="1800" kern="1200">
+                <a:solidFill>
+                  <a:schemeClr val="tx1"/>
+                </a:solidFill>
+                <a:latin typeface="+mn-lt"/>
+                <a:ea typeface="+mn-ea"/>
+                <a:cs typeface="+mn-cs"/>
+              </a:defRPr>
+            </a:lvl8pPr>
+            <a:lvl9pPr marL="3886200" indent="-228600" algn="l" defTabSz="914400" rtl="0" eaLnBrk="1" latinLnBrk="0" hangingPunct="1">
+              <a:lnSpc>
+                <a:spcPct val="90000"/>
+              </a:lnSpc>
+              <a:spcBef>
+                <a:spcPts val="500"/>
+              </a:spcBef>
+              <a:buFont typeface="Arial" panose="020B0604020202020204" pitchFamily="34" charset="0"/>
+              <a:buChar char="•"/>
+              <a:defRPr sz="1800" kern="1200">
+                <a:solidFill>
+                  <a:schemeClr val="tx1"/>
+                </a:solidFill>
+                <a:latin typeface="+mn-lt"/>
+                <a:ea typeface="+mn-ea"/>
+                <a:cs typeface="+mn-cs"/>
+              </a:defRPr>
+            </a:lvl9pPr>
+          </a:lstStyle>
+          <a:p>
+            <a:pPr marL="0" indent="0">
+              <a:buNone/>
+            </a:pPr>
+            <a:r>
+              <a:rPr lang="en-US" sz="2400" i="1" dirty="0"/>
+              <a:t>In my run the ATE RMSE was 0.181 without IMU and 0.299 with IMU </a:t>
+            </a:r>
+            <a:r>
+              <a:rPr lang="en-US" sz="2400" i="1" dirty="0" err="1"/>
+              <a:t>preintegration</a:t>
+            </a:r>
+            <a:r>
+              <a:rPr lang="en-US" sz="2400" i="1" dirty="0"/>
+              <a:t>, so </a:t>
+            </a:r>
+            <a:r>
+              <a:rPr lang="en-US" sz="2400" i="1" dirty="0" err="1"/>
+              <a:t>preintegration</a:t>
+            </a:r>
+            <a:r>
+              <a:rPr lang="en-US" sz="2400" i="1" dirty="0"/>
+              <a:t> actually made it worse in this case. That can happen for a few practical reasons: even a small timestamp mismatch between LiDAR and IMU can hurt fusion, the IMU noise/bias settings might not be tuned well, initialization (especially bias/orientation) might be off, or the IMU-LiDAR extrinsic/frame alignment could be slightly wrong. Also, since IMU is high-rate, small bias errors get integrated many times and can accumulate drift, which can pull the estimate away from the LiDAR-only solution.</a:t>
+            </a:r>
+            <a:endParaRPr lang="en-US" sz="2000" i="1" dirty="0"/>
+          </a:p>
+        </p:txBody>
+      </p:sp>
+      <p:pic>
+        <p:nvPicPr>
+          <p:cNvPr id="4" name="Picture 3">
+            <a:extLst>
+              <a:ext uri="{FF2B5EF4-FFF2-40B4-BE49-F238E27FC236}">
+                <a16:creationId xmlns:a16="http://schemas.microsoft.com/office/drawing/2014/main" id="{3F67CB60-8FC3-9878-BF89-97F2210E6F36}"/>
+              </a:ext>
+            </a:extLst>
+          </p:cNvPr>
+          <p:cNvPicPr>
+            <a:picLocks noChangeAspect="1"/>
+          </p:cNvPicPr>
+          <p:nvPr/>
+        </p:nvPicPr>
+        <p:blipFill>
+          <a:blip r:embed="rId2"/>
+          <a:stretch>
+            <a:fillRect/>
+          </a:stretch>
+        </p:blipFill>
+        <p:spPr>
+          <a:xfrm>
+            <a:off x="6369050" y="1632715"/>
+            <a:ext cx="4432300" cy="4432300"/>
+          </a:xfrm>
+          <a:prstGeom prst="rect">
+            <a:avLst/>
+          </a:prstGeom>
+        </p:spPr>
+      </p:pic>
+    </p:spTree>
+    <p:extLst>
+      <p:ext uri="{BB962C8B-B14F-4D97-AF65-F5344CB8AC3E}">
+        <p14:creationId xmlns:p14="http://schemas.microsoft.com/office/powerpoint/2010/main" val="1351392675"/>
+      </p:ext>
+    </p:extLst>
+  </p:cSld>
+  <p:clrMapOvr>
+    <a:masterClrMapping/>
+  </p:clrMapOvr>
+</p:sld>
+</file>
+
+<file path=ppt/slides/slide6.xml><?xml version="1.0" encoding="utf-8"?>
+<p:sld xmlns:a="http://schemas.openxmlformats.org/drawingml/2006/main" xmlns:r="http://schemas.openxmlformats.org/officeDocument/2006/relationships" xmlns:p="http://schemas.openxmlformats.org/presentationml/2006/main">
+  <p:cSld>
+    <p:spTree>
+      <p:nvGrpSpPr>
+        <p:cNvPr id="1" name="">
+          <a:extLst>
+            <a:ext uri="{FF2B5EF4-FFF2-40B4-BE49-F238E27FC236}">
+              <a16:creationId xmlns:a16="http://schemas.microsoft.com/office/drawing/2014/main" id="{A598258E-875E-6E24-303C-7BDB9EE65439}"/>
+            </a:ext>
+          </a:extLst>
+        </p:cNvPr>
+        <p:cNvGrpSpPr/>
+        <p:nvPr/>
+      </p:nvGrpSpPr>
+      <p:grpSpPr>
+        <a:xfrm>
+          <a:off x="0" y="0"/>
+          <a:ext cx="0" cy="0"/>
+          <a:chOff x="0" y="0"/>
+          <a:chExt cx="0" cy="0"/>
+        </a:xfrm>
+      </p:grpSpPr>
+      <p:sp>
+        <p:nvSpPr>
+          <p:cNvPr id="2" name="Title 1">
+            <a:extLst>
+              <a:ext uri="{FF2B5EF4-FFF2-40B4-BE49-F238E27FC236}">
+                <a16:creationId xmlns:a16="http://schemas.microsoft.com/office/drawing/2014/main" id="{8BFD1761-6B1B-DD9D-EDDE-CC648FF36213}"/>
+              </a:ext>
+            </a:extLst>
+          </p:cNvPr>
+          <p:cNvSpPr>
+            <a:spLocks noGrp="1"/>
+          </p:cNvSpPr>
+          <p:nvPr>
+            <p:ph type="title"/>
+          </p:nvPr>
+        </p:nvSpPr>
+        <p:spPr>
+          <a:xfrm>
+            <a:off x="838200" y="111125"/>
+            <a:ext cx="10515600" cy="1531407"/>
+          </a:xfrm>
+        </p:spPr>
+        <p:txBody>
+          <a:bodyPr>
+            <a:normAutofit fontScale="90000"/>
+          </a:bodyPr>
+          <a:lstStyle/>
+          <a:p>
+            <a:r>
+              <a:rPr lang="en-US" sz="2800" dirty="0"/>
+              <a:t>Paste a screenshot of your point-cloud map (batch or ISAM2; do not copy the image from notebook!). Comment on what parts look consistent and any artifacts or distortions. Why might our pipeline have distortions in the map?* [5 pts]</a:t>
+            </a:r>
+          </a:p>
+        </p:txBody>
+      </p:sp>
+      <p:sp>
+        <p:nvSpPr>
+          <p:cNvPr id="3" name="Content Placeholder 2">
+            <a:extLst>
+              <a:ext uri="{FF2B5EF4-FFF2-40B4-BE49-F238E27FC236}">
+                <a16:creationId xmlns:a16="http://schemas.microsoft.com/office/drawing/2014/main" id="{4773AD08-6397-4F8B-3513-5231FFBDE7E5}"/>
+              </a:ext>
+            </a:extLst>
+          </p:cNvPr>
+          <p:cNvSpPr>
+            <a:spLocks noGrp="1"/>
+          </p:cNvSpPr>
+          <p:nvPr>
+            <p:ph idx="1"/>
+          </p:nvPr>
+        </p:nvSpPr>
+        <p:spPr>
+          <a:xfrm>
+            <a:off x="838200" y="1563158"/>
             <a:ext cx="4978400" cy="4351338"/>
           </a:xfrm>
         </p:spPr>
@@ -3945,9 +4637,10 @@
               <a:buNone/>
             </a:pPr>
             <a:r>
-              <a:rPr lang="en-US" sz="2400" i="1" dirty="0"/>
-              <a:t>Type answer here</a:t>
-            </a:r>
+              <a:rPr lang="en-US" i="1" dirty="0"/>
+              <a:t>The main map structure looks mostly consistent, but there are outlying points and some blur/ghosting, especially around edges. Those artifacts likely come from drift. This is best described as a hybrid: mostly LiDAR-inertial odometry with some SLAM behavior, not fully globally consistent SLAM.</a:t>
+            </a:r>
+            <a:endParaRPr lang="en-US" sz="2400" i="1" dirty="0"/>
           </a:p>
         </p:txBody>
       </p:sp>
@@ -3956,7 +4649,7 @@
           <p:cNvPr id="4" name="Content Placeholder 2">
             <a:extLst>
               <a:ext uri="{FF2B5EF4-FFF2-40B4-BE49-F238E27FC236}">
-                <a16:creationId xmlns:a16="http://schemas.microsoft.com/office/drawing/2014/main" id="{88B5760F-136C-22A8-41F2-45ADE3BD0EAD}"/>
+                <a16:creationId xmlns:a16="http://schemas.microsoft.com/office/drawing/2014/main" id="{67553AFD-0E65-CF76-D6B2-11BAE799E06B}"/>
               </a:ext>
             </a:extLst>
           </p:cNvPr>
@@ -3967,8 +4660,8 @@
         </p:nvSpPr>
         <p:spPr>
           <a:xfrm>
-            <a:off x="6375400" y="1563158"/>
-            <a:ext cx="4978400" cy="4351338"/>
+            <a:off x="7576456" y="5437414"/>
+            <a:ext cx="3777343" cy="477082"/>
           </a:xfrm>
           <a:prstGeom prst="rect">
             <a:avLst/>
@@ -4149,104 +4842,17 @@
             </a:pPr>
             <a:r>
               <a:rPr lang="en-US" sz="2400" i="1" dirty="0"/>
-              <a:t>Paste screenshot here</a:t>
-            </a:r>
-          </a:p>
-        </p:txBody>
-      </p:sp>
-    </p:spTree>
-    <p:extLst>
-      <p:ext uri="{BB962C8B-B14F-4D97-AF65-F5344CB8AC3E}">
-        <p14:creationId xmlns:p14="http://schemas.microsoft.com/office/powerpoint/2010/main" val="3031350474"/>
-      </p:ext>
-    </p:extLst>
-  </p:cSld>
-  <p:clrMapOvr>
-    <a:masterClrMapping/>
-  </p:clrMapOvr>
-</p:sld>
-</file>
-
-<file path=ppt/slides/slide5.xml><?xml version="1.0" encoding="utf-8"?>
-<p:sld xmlns:a="http://schemas.openxmlformats.org/drawingml/2006/main" xmlns:r="http://schemas.openxmlformats.org/officeDocument/2006/relationships" xmlns:p="http://schemas.openxmlformats.org/presentationml/2006/main">
-  <p:cSld>
-    <p:spTree>
-      <p:nvGrpSpPr>
-        <p:cNvPr id="1" name="">
-          <a:extLst>
-            <a:ext uri="{FF2B5EF4-FFF2-40B4-BE49-F238E27FC236}">
-              <a16:creationId xmlns:a16="http://schemas.microsoft.com/office/drawing/2014/main" id="{96020D1F-1B62-F1BD-9632-9AAD0CAD4D77}"/>
-            </a:ext>
-          </a:extLst>
-        </p:cNvPr>
-        <p:cNvGrpSpPr/>
-        <p:nvPr/>
-      </p:nvGrpSpPr>
-      <p:grpSpPr>
-        <a:xfrm>
-          <a:off x="0" y="0"/>
-          <a:ext cx="0" cy="0"/>
-          <a:chOff x="0" y="0"/>
-          <a:chExt cx="0" cy="0"/>
-        </a:xfrm>
-      </p:grpSpPr>
-      <p:sp>
-        <p:nvSpPr>
-          <p:cNvPr id="2" name="Title 1">
-            <a:extLst>
-              <a:ext uri="{FF2B5EF4-FFF2-40B4-BE49-F238E27FC236}">
-                <a16:creationId xmlns:a16="http://schemas.microsoft.com/office/drawing/2014/main" id="{AF3B030F-DC72-F3A6-F3EC-C9335BA0B578}"/>
-              </a:ext>
-            </a:extLst>
-          </p:cNvPr>
-          <p:cNvSpPr>
-            <a:spLocks noGrp="1"/>
-          </p:cNvSpPr>
-          <p:nvPr>
-            <p:ph type="title"/>
-          </p:nvPr>
-        </p:nvSpPr>
-        <p:spPr>
-          <a:xfrm>
-            <a:off x="838200" y="48683"/>
-            <a:ext cx="10515600" cy="1776942"/>
-          </a:xfrm>
-        </p:spPr>
-        <p:txBody>
-          <a:bodyPr>
-            <a:normAutofit/>
-          </a:bodyPr>
-          <a:lstStyle/>
-          <a:p>
-            <a:r>
-              <a:rPr lang="en-US" sz="2800" dirty="0"/>
-              <a:t>Paste a screenshot of your comparison of IMU </a:t>
-            </a:r>
-            <a:r>
-              <a:rPr lang="en-US" sz="2800" dirty="0" err="1"/>
-              <a:t>preintegration</a:t>
-            </a:r>
-            <a:r>
-              <a:rPr lang="en-US" sz="2800" dirty="0"/>
-              <a:t> usage and enter your ATE RMSEs. Explain why IMU </a:t>
-            </a:r>
-            <a:r>
-              <a:rPr lang="en-US" sz="2800" dirty="0" err="1"/>
-              <a:t>preintegration</a:t>
-            </a:r>
-            <a:r>
-              <a:rPr lang="en-US" sz="2800" dirty="0"/>
-              <a:t> can sometimes degrade performance. Discuss a few plausible causes *. [5 pts]</a:t>
-            </a:r>
-          </a:p>
-        </p:txBody>
-      </p:sp>
-      <p:sp>
-        <p:nvSpPr>
-          <p:cNvPr id="3" name="TextBox 2">
-            <a:extLst>
-              <a:ext uri="{FF2B5EF4-FFF2-40B4-BE49-F238E27FC236}">
-                <a16:creationId xmlns:a16="http://schemas.microsoft.com/office/drawing/2014/main" id="{FC4A03DF-A12C-6CBA-397A-1C31D0E9850C}"/>
+              <a:t>ISAM2 point-cloud</a:t>
+            </a:r>
+          </a:p>
+        </p:txBody>
+      </p:sp>
+      <p:sp>
+        <p:nvSpPr>
+          <p:cNvPr id="5" name="TextBox 4">
+            <a:extLst>
+              <a:ext uri="{FF2B5EF4-FFF2-40B4-BE49-F238E27FC236}">
+                <a16:creationId xmlns:a16="http://schemas.microsoft.com/office/drawing/2014/main" id="{D7D350C8-2C1A-2D65-0B55-598A86259B68}"/>
               </a:ext>
             </a:extLst>
           </p:cNvPr>
@@ -4271,765 +4877,41 @@
           <a:p>
             <a:r>
               <a:rPr lang="en-US" dirty="0"/>
-              <a:t>* Examples of such causes could include sensor time offset, incorrect noise or bias settings, bad initialization, frame or extrinsic mismatch, or integration of biased high-rate measurements.</a:t>
-            </a:r>
-          </a:p>
-        </p:txBody>
-      </p:sp>
-      <p:sp>
-        <p:nvSpPr>
-          <p:cNvPr id="9" name="Content Placeholder 2">
-            <a:extLst>
-              <a:ext uri="{FF2B5EF4-FFF2-40B4-BE49-F238E27FC236}">
-                <a16:creationId xmlns:a16="http://schemas.microsoft.com/office/drawing/2014/main" id="{9932BD16-1E0D-FD0B-E369-97E8D13EB903}"/>
-              </a:ext>
-            </a:extLst>
-          </p:cNvPr>
-          <p:cNvSpPr txBox="1">
-            <a:spLocks/>
-          </p:cNvSpPr>
+              <a:t>*Reflect on the limits of calling this pipeline “SLAM.” Is it more precise to call it LiDAR-inertial odometry, SLAM, or a hybrid? Consider the presence or absence of loop closure, global consistency, and mapping behavior.</a:t>
+            </a:r>
+          </a:p>
+        </p:txBody>
+      </p:sp>
+      <p:pic>
+        <p:nvPicPr>
+          <p:cNvPr id="6" name="Picture 5">
+            <a:extLst>
+              <a:ext uri="{FF2B5EF4-FFF2-40B4-BE49-F238E27FC236}">
+                <a16:creationId xmlns:a16="http://schemas.microsoft.com/office/drawing/2014/main" id="{DA8D0CB1-2831-8DE8-4199-9380BC725DF7}"/>
+              </a:ext>
+            </a:extLst>
+          </p:cNvPr>
+          <p:cNvPicPr>
+            <a:picLocks noChangeAspect="1"/>
+          </p:cNvPicPr>
           <p:nvPr/>
-        </p:nvSpPr>
+        </p:nvPicPr>
+        <p:blipFill>
+          <a:blip r:embed="rId2"/>
+          <a:stretch>
+            <a:fillRect/>
+          </a:stretch>
+        </p:blipFill>
         <p:spPr>
           <a:xfrm>
-            <a:off x="838200" y="1563158"/>
-            <a:ext cx="4978400" cy="4351338"/>
+            <a:off x="6223451" y="1451008"/>
+            <a:ext cx="5409749" cy="3862161"/>
           </a:xfrm>
           <a:prstGeom prst="rect">
             <a:avLst/>
           </a:prstGeom>
         </p:spPr>
-        <p:txBody>
-          <a:bodyPr vert="horz" lIns="91440" tIns="45720" rIns="91440" bIns="45720" rtlCol="0">
-            <a:normAutofit/>
-          </a:bodyPr>
-          <a:lstStyle>
-            <a:lvl1pPr marL="228600" indent="-228600" algn="l" defTabSz="914400" rtl="0" eaLnBrk="1" latinLnBrk="0" hangingPunct="1">
-              <a:lnSpc>
-                <a:spcPct val="90000"/>
-              </a:lnSpc>
-              <a:spcBef>
-                <a:spcPts val="1000"/>
-              </a:spcBef>
-              <a:buFont typeface="Arial" panose="020B0604020202020204" pitchFamily="34" charset="0"/>
-              <a:buChar char="•"/>
-              <a:defRPr sz="2800" kern="1200">
-                <a:solidFill>
-                  <a:schemeClr val="tx1"/>
-                </a:solidFill>
-                <a:latin typeface="+mn-lt"/>
-                <a:ea typeface="+mn-ea"/>
-                <a:cs typeface="+mn-cs"/>
-              </a:defRPr>
-            </a:lvl1pPr>
-            <a:lvl2pPr marL="685800" indent="-228600" algn="l" defTabSz="914400" rtl="0" eaLnBrk="1" latinLnBrk="0" hangingPunct="1">
-              <a:lnSpc>
-                <a:spcPct val="90000"/>
-              </a:lnSpc>
-              <a:spcBef>
-                <a:spcPts val="500"/>
-              </a:spcBef>
-              <a:buFont typeface="Arial" panose="020B0604020202020204" pitchFamily="34" charset="0"/>
-              <a:buChar char="•"/>
-              <a:defRPr sz="2400" kern="1200">
-                <a:solidFill>
-                  <a:schemeClr val="tx1"/>
-                </a:solidFill>
-                <a:latin typeface="+mn-lt"/>
-                <a:ea typeface="+mn-ea"/>
-                <a:cs typeface="+mn-cs"/>
-              </a:defRPr>
-            </a:lvl2pPr>
-            <a:lvl3pPr marL="1143000" indent="-228600" algn="l" defTabSz="914400" rtl="0" eaLnBrk="1" latinLnBrk="0" hangingPunct="1">
-              <a:lnSpc>
-                <a:spcPct val="90000"/>
-              </a:lnSpc>
-              <a:spcBef>
-                <a:spcPts val="500"/>
-              </a:spcBef>
-              <a:buFont typeface="Arial" panose="020B0604020202020204" pitchFamily="34" charset="0"/>
-              <a:buChar char="•"/>
-              <a:defRPr sz="2000" kern="1200">
-                <a:solidFill>
-                  <a:schemeClr val="tx1"/>
-                </a:solidFill>
-                <a:latin typeface="+mn-lt"/>
-                <a:ea typeface="+mn-ea"/>
-                <a:cs typeface="+mn-cs"/>
-              </a:defRPr>
-            </a:lvl3pPr>
-            <a:lvl4pPr marL="1600200" indent="-228600" algn="l" defTabSz="914400" rtl="0" eaLnBrk="1" latinLnBrk="0" hangingPunct="1">
-              <a:lnSpc>
-                <a:spcPct val="90000"/>
-              </a:lnSpc>
-              <a:spcBef>
-                <a:spcPts val="500"/>
-              </a:spcBef>
-              <a:buFont typeface="Arial" panose="020B0604020202020204" pitchFamily="34" charset="0"/>
-              <a:buChar char="•"/>
-              <a:defRPr sz="1800" kern="1200">
-                <a:solidFill>
-                  <a:schemeClr val="tx1"/>
-                </a:solidFill>
-                <a:latin typeface="+mn-lt"/>
-                <a:ea typeface="+mn-ea"/>
-                <a:cs typeface="+mn-cs"/>
-              </a:defRPr>
-            </a:lvl4pPr>
-            <a:lvl5pPr marL="2057400" indent="-228600" algn="l" defTabSz="914400" rtl="0" eaLnBrk="1" latinLnBrk="0" hangingPunct="1">
-              <a:lnSpc>
-                <a:spcPct val="90000"/>
-              </a:lnSpc>
-              <a:spcBef>
-                <a:spcPts val="500"/>
-              </a:spcBef>
-              <a:buFont typeface="Arial" panose="020B0604020202020204" pitchFamily="34" charset="0"/>
-              <a:buChar char="•"/>
-              <a:defRPr sz="1800" kern="1200">
-                <a:solidFill>
-                  <a:schemeClr val="tx1"/>
-                </a:solidFill>
-                <a:latin typeface="+mn-lt"/>
-                <a:ea typeface="+mn-ea"/>
-                <a:cs typeface="+mn-cs"/>
-              </a:defRPr>
-            </a:lvl5pPr>
-            <a:lvl6pPr marL="2514600" indent="-228600" algn="l" defTabSz="914400" rtl="0" eaLnBrk="1" latinLnBrk="0" hangingPunct="1">
-              <a:lnSpc>
-                <a:spcPct val="90000"/>
-              </a:lnSpc>
-              <a:spcBef>
-                <a:spcPts val="500"/>
-              </a:spcBef>
-              <a:buFont typeface="Arial" panose="020B0604020202020204" pitchFamily="34" charset="0"/>
-              <a:buChar char="•"/>
-              <a:defRPr sz="1800" kern="1200">
-                <a:solidFill>
-                  <a:schemeClr val="tx1"/>
-                </a:solidFill>
-                <a:latin typeface="+mn-lt"/>
-                <a:ea typeface="+mn-ea"/>
-                <a:cs typeface="+mn-cs"/>
-              </a:defRPr>
-            </a:lvl6pPr>
-            <a:lvl7pPr marL="2971800" indent="-228600" algn="l" defTabSz="914400" rtl="0" eaLnBrk="1" latinLnBrk="0" hangingPunct="1">
-              <a:lnSpc>
-                <a:spcPct val="90000"/>
-              </a:lnSpc>
-              <a:spcBef>
-                <a:spcPts val="500"/>
-              </a:spcBef>
-              <a:buFont typeface="Arial" panose="020B0604020202020204" pitchFamily="34" charset="0"/>
-              <a:buChar char="•"/>
-              <a:defRPr sz="1800" kern="1200">
-                <a:solidFill>
-                  <a:schemeClr val="tx1"/>
-                </a:solidFill>
-                <a:latin typeface="+mn-lt"/>
-                <a:ea typeface="+mn-ea"/>
-                <a:cs typeface="+mn-cs"/>
-              </a:defRPr>
-            </a:lvl7pPr>
-            <a:lvl8pPr marL="3429000" indent="-228600" algn="l" defTabSz="914400" rtl="0" eaLnBrk="1" latinLnBrk="0" hangingPunct="1">
-              <a:lnSpc>
-                <a:spcPct val="90000"/>
-              </a:lnSpc>
-              <a:spcBef>
-                <a:spcPts val="500"/>
-              </a:spcBef>
-              <a:buFont typeface="Arial" panose="020B0604020202020204" pitchFamily="34" charset="0"/>
-              <a:buChar char="•"/>
-              <a:defRPr sz="1800" kern="1200">
-                <a:solidFill>
-                  <a:schemeClr val="tx1"/>
-                </a:solidFill>
-                <a:latin typeface="+mn-lt"/>
-                <a:ea typeface="+mn-ea"/>
-                <a:cs typeface="+mn-cs"/>
-              </a:defRPr>
-            </a:lvl8pPr>
-            <a:lvl9pPr marL="3886200" indent="-228600" algn="l" defTabSz="914400" rtl="0" eaLnBrk="1" latinLnBrk="0" hangingPunct="1">
-              <a:lnSpc>
-                <a:spcPct val="90000"/>
-              </a:lnSpc>
-              <a:spcBef>
-                <a:spcPts val="500"/>
-              </a:spcBef>
-              <a:buFont typeface="Arial" panose="020B0604020202020204" pitchFamily="34" charset="0"/>
-              <a:buChar char="•"/>
-              <a:defRPr sz="1800" kern="1200">
-                <a:solidFill>
-                  <a:schemeClr val="tx1"/>
-                </a:solidFill>
-                <a:latin typeface="+mn-lt"/>
-                <a:ea typeface="+mn-ea"/>
-                <a:cs typeface="+mn-cs"/>
-              </a:defRPr>
-            </a:lvl9pPr>
-          </a:lstStyle>
-          <a:p>
-            <a:pPr marL="0" indent="0">
-              <a:buFont typeface="Arial" panose="020B0604020202020204" pitchFamily="34" charset="0"/>
-              <a:buNone/>
-            </a:pPr>
-            <a:r>
-              <a:rPr lang="en-US" sz="2400" i="1"/>
-              <a:t>Type answer here</a:t>
-            </a:r>
-            <a:endParaRPr lang="en-US" sz="2400" i="1" dirty="0"/>
-          </a:p>
-        </p:txBody>
-      </p:sp>
-      <p:sp>
-        <p:nvSpPr>
-          <p:cNvPr id="10" name="Content Placeholder 2">
-            <a:extLst>
-              <a:ext uri="{FF2B5EF4-FFF2-40B4-BE49-F238E27FC236}">
-                <a16:creationId xmlns:a16="http://schemas.microsoft.com/office/drawing/2014/main" id="{C1FEAC51-4750-CB07-4065-89456C637EF5}"/>
-              </a:ext>
-            </a:extLst>
-          </p:cNvPr>
-          <p:cNvSpPr txBox="1">
-            <a:spLocks/>
-          </p:cNvSpPr>
-          <p:nvPr/>
-        </p:nvSpPr>
-        <p:spPr>
-          <a:xfrm>
-            <a:off x="6375400" y="1563158"/>
-            <a:ext cx="4978400" cy="4351338"/>
-          </a:xfrm>
-          <a:prstGeom prst="rect">
-            <a:avLst/>
-          </a:prstGeom>
-        </p:spPr>
-        <p:txBody>
-          <a:bodyPr vert="horz" lIns="91440" tIns="45720" rIns="91440" bIns="45720" rtlCol="0">
-            <a:normAutofit/>
-          </a:bodyPr>
-          <a:lstStyle>
-            <a:lvl1pPr marL="228600" indent="-228600" algn="l" defTabSz="914400" rtl="0" eaLnBrk="1" latinLnBrk="0" hangingPunct="1">
-              <a:lnSpc>
-                <a:spcPct val="90000"/>
-              </a:lnSpc>
-              <a:spcBef>
-                <a:spcPts val="1000"/>
-              </a:spcBef>
-              <a:buFont typeface="Arial" panose="020B0604020202020204" pitchFamily="34" charset="0"/>
-              <a:buChar char="•"/>
-              <a:defRPr sz="2800" kern="1200">
-                <a:solidFill>
-                  <a:schemeClr val="tx1"/>
-                </a:solidFill>
-                <a:latin typeface="+mn-lt"/>
-                <a:ea typeface="+mn-ea"/>
-                <a:cs typeface="+mn-cs"/>
-              </a:defRPr>
-            </a:lvl1pPr>
-            <a:lvl2pPr marL="685800" indent="-228600" algn="l" defTabSz="914400" rtl="0" eaLnBrk="1" latinLnBrk="0" hangingPunct="1">
-              <a:lnSpc>
-                <a:spcPct val="90000"/>
-              </a:lnSpc>
-              <a:spcBef>
-                <a:spcPts val="500"/>
-              </a:spcBef>
-              <a:buFont typeface="Arial" panose="020B0604020202020204" pitchFamily="34" charset="0"/>
-              <a:buChar char="•"/>
-              <a:defRPr sz="2400" kern="1200">
-                <a:solidFill>
-                  <a:schemeClr val="tx1"/>
-                </a:solidFill>
-                <a:latin typeface="+mn-lt"/>
-                <a:ea typeface="+mn-ea"/>
-                <a:cs typeface="+mn-cs"/>
-              </a:defRPr>
-            </a:lvl2pPr>
-            <a:lvl3pPr marL="1143000" indent="-228600" algn="l" defTabSz="914400" rtl="0" eaLnBrk="1" latinLnBrk="0" hangingPunct="1">
-              <a:lnSpc>
-                <a:spcPct val="90000"/>
-              </a:lnSpc>
-              <a:spcBef>
-                <a:spcPts val="500"/>
-              </a:spcBef>
-              <a:buFont typeface="Arial" panose="020B0604020202020204" pitchFamily="34" charset="0"/>
-              <a:buChar char="•"/>
-              <a:defRPr sz="2000" kern="1200">
-                <a:solidFill>
-                  <a:schemeClr val="tx1"/>
-                </a:solidFill>
-                <a:latin typeface="+mn-lt"/>
-                <a:ea typeface="+mn-ea"/>
-                <a:cs typeface="+mn-cs"/>
-              </a:defRPr>
-            </a:lvl3pPr>
-            <a:lvl4pPr marL="1600200" indent="-228600" algn="l" defTabSz="914400" rtl="0" eaLnBrk="1" latinLnBrk="0" hangingPunct="1">
-              <a:lnSpc>
-                <a:spcPct val="90000"/>
-              </a:lnSpc>
-              <a:spcBef>
-                <a:spcPts val="500"/>
-              </a:spcBef>
-              <a:buFont typeface="Arial" panose="020B0604020202020204" pitchFamily="34" charset="0"/>
-              <a:buChar char="•"/>
-              <a:defRPr sz="1800" kern="1200">
-                <a:solidFill>
-                  <a:schemeClr val="tx1"/>
-                </a:solidFill>
-                <a:latin typeface="+mn-lt"/>
-                <a:ea typeface="+mn-ea"/>
-                <a:cs typeface="+mn-cs"/>
-              </a:defRPr>
-            </a:lvl4pPr>
-            <a:lvl5pPr marL="2057400" indent="-228600" algn="l" defTabSz="914400" rtl="0" eaLnBrk="1" latinLnBrk="0" hangingPunct="1">
-              <a:lnSpc>
-                <a:spcPct val="90000"/>
-              </a:lnSpc>
-              <a:spcBef>
-                <a:spcPts val="500"/>
-              </a:spcBef>
-              <a:buFont typeface="Arial" panose="020B0604020202020204" pitchFamily="34" charset="0"/>
-              <a:buChar char="•"/>
-              <a:defRPr sz="1800" kern="1200">
-                <a:solidFill>
-                  <a:schemeClr val="tx1"/>
-                </a:solidFill>
-                <a:latin typeface="+mn-lt"/>
-                <a:ea typeface="+mn-ea"/>
-                <a:cs typeface="+mn-cs"/>
-              </a:defRPr>
-            </a:lvl5pPr>
-            <a:lvl6pPr marL="2514600" indent="-228600" algn="l" defTabSz="914400" rtl="0" eaLnBrk="1" latinLnBrk="0" hangingPunct="1">
-              <a:lnSpc>
-                <a:spcPct val="90000"/>
-              </a:lnSpc>
-              <a:spcBef>
-                <a:spcPts val="500"/>
-              </a:spcBef>
-              <a:buFont typeface="Arial" panose="020B0604020202020204" pitchFamily="34" charset="0"/>
-              <a:buChar char="•"/>
-              <a:defRPr sz="1800" kern="1200">
-                <a:solidFill>
-                  <a:schemeClr val="tx1"/>
-                </a:solidFill>
-                <a:latin typeface="+mn-lt"/>
-                <a:ea typeface="+mn-ea"/>
-                <a:cs typeface="+mn-cs"/>
-              </a:defRPr>
-            </a:lvl6pPr>
-            <a:lvl7pPr marL="2971800" indent="-228600" algn="l" defTabSz="914400" rtl="0" eaLnBrk="1" latinLnBrk="0" hangingPunct="1">
-              <a:lnSpc>
-                <a:spcPct val="90000"/>
-              </a:lnSpc>
-              <a:spcBef>
-                <a:spcPts val="500"/>
-              </a:spcBef>
-              <a:buFont typeface="Arial" panose="020B0604020202020204" pitchFamily="34" charset="0"/>
-              <a:buChar char="•"/>
-              <a:defRPr sz="1800" kern="1200">
-                <a:solidFill>
-                  <a:schemeClr val="tx1"/>
-                </a:solidFill>
-                <a:latin typeface="+mn-lt"/>
-                <a:ea typeface="+mn-ea"/>
-                <a:cs typeface="+mn-cs"/>
-              </a:defRPr>
-            </a:lvl7pPr>
-            <a:lvl8pPr marL="3429000" indent="-228600" algn="l" defTabSz="914400" rtl="0" eaLnBrk="1" latinLnBrk="0" hangingPunct="1">
-              <a:lnSpc>
-                <a:spcPct val="90000"/>
-              </a:lnSpc>
-              <a:spcBef>
-                <a:spcPts val="500"/>
-              </a:spcBef>
-              <a:buFont typeface="Arial" panose="020B0604020202020204" pitchFamily="34" charset="0"/>
-              <a:buChar char="•"/>
-              <a:defRPr sz="1800" kern="1200">
-                <a:solidFill>
-                  <a:schemeClr val="tx1"/>
-                </a:solidFill>
-                <a:latin typeface="+mn-lt"/>
-                <a:ea typeface="+mn-ea"/>
-                <a:cs typeface="+mn-cs"/>
-              </a:defRPr>
-            </a:lvl8pPr>
-            <a:lvl9pPr marL="3886200" indent="-228600" algn="l" defTabSz="914400" rtl="0" eaLnBrk="1" latinLnBrk="0" hangingPunct="1">
-              <a:lnSpc>
-                <a:spcPct val="90000"/>
-              </a:lnSpc>
-              <a:spcBef>
-                <a:spcPts val="500"/>
-              </a:spcBef>
-              <a:buFont typeface="Arial" panose="020B0604020202020204" pitchFamily="34" charset="0"/>
-              <a:buChar char="•"/>
-              <a:defRPr sz="1800" kern="1200">
-                <a:solidFill>
-                  <a:schemeClr val="tx1"/>
-                </a:solidFill>
-                <a:latin typeface="+mn-lt"/>
-                <a:ea typeface="+mn-ea"/>
-                <a:cs typeface="+mn-cs"/>
-              </a:defRPr>
-            </a:lvl9pPr>
-          </a:lstStyle>
-          <a:p>
-            <a:pPr marL="0" indent="0">
-              <a:buFont typeface="Arial" panose="020B0604020202020204" pitchFamily="34" charset="0"/>
-              <a:buNone/>
-            </a:pPr>
-            <a:r>
-              <a:rPr lang="en-US" sz="2400" i="1" dirty="0"/>
-              <a:t>Paste screenshot here</a:t>
-            </a:r>
-          </a:p>
-        </p:txBody>
-      </p:sp>
-    </p:spTree>
-    <p:extLst>
-      <p:ext uri="{BB962C8B-B14F-4D97-AF65-F5344CB8AC3E}">
-        <p14:creationId xmlns:p14="http://schemas.microsoft.com/office/powerpoint/2010/main" val="1351392675"/>
-      </p:ext>
-    </p:extLst>
-  </p:cSld>
-  <p:clrMapOvr>
-    <a:masterClrMapping/>
-  </p:clrMapOvr>
-</p:sld>
-</file>
-
-<file path=ppt/slides/slide6.xml><?xml version="1.0" encoding="utf-8"?>
-<p:sld xmlns:a="http://schemas.openxmlformats.org/drawingml/2006/main" xmlns:r="http://schemas.openxmlformats.org/officeDocument/2006/relationships" xmlns:p="http://schemas.openxmlformats.org/presentationml/2006/main">
-  <p:cSld>
-    <p:spTree>
-      <p:nvGrpSpPr>
-        <p:cNvPr id="1" name="">
-          <a:extLst>
-            <a:ext uri="{FF2B5EF4-FFF2-40B4-BE49-F238E27FC236}">
-              <a16:creationId xmlns:a16="http://schemas.microsoft.com/office/drawing/2014/main" id="{A598258E-875E-6E24-303C-7BDB9EE65439}"/>
-            </a:ext>
-          </a:extLst>
-        </p:cNvPr>
-        <p:cNvGrpSpPr/>
-        <p:nvPr/>
-      </p:nvGrpSpPr>
-      <p:grpSpPr>
-        <a:xfrm>
-          <a:off x="0" y="0"/>
-          <a:ext cx="0" cy="0"/>
-          <a:chOff x="0" y="0"/>
-          <a:chExt cx="0" cy="0"/>
-        </a:xfrm>
-      </p:grpSpPr>
-      <p:sp>
-        <p:nvSpPr>
-          <p:cNvPr id="2" name="Title 1">
-            <a:extLst>
-              <a:ext uri="{FF2B5EF4-FFF2-40B4-BE49-F238E27FC236}">
-                <a16:creationId xmlns:a16="http://schemas.microsoft.com/office/drawing/2014/main" id="{8BFD1761-6B1B-DD9D-EDDE-CC648FF36213}"/>
-              </a:ext>
-            </a:extLst>
-          </p:cNvPr>
-          <p:cNvSpPr>
-            <a:spLocks noGrp="1"/>
-          </p:cNvSpPr>
-          <p:nvPr>
-            <p:ph type="title"/>
-          </p:nvPr>
-        </p:nvSpPr>
-        <p:spPr>
-          <a:xfrm>
-            <a:off x="838200" y="111125"/>
-            <a:ext cx="10515600" cy="1531407"/>
-          </a:xfrm>
-        </p:spPr>
-        <p:txBody>
-          <a:bodyPr>
-            <a:normAutofit fontScale="90000"/>
-          </a:bodyPr>
-          <a:lstStyle/>
-          <a:p>
-            <a:r>
-              <a:rPr lang="en-US" sz="2800" dirty="0"/>
-              <a:t>Paste a screenshot of your point-cloud map (batch or ISAM2; do not copy the image from notebook!). Comment on what parts look consistent and any artifacts or distortions. Why might our pipeline have distortions in the map?* [5 pts]</a:t>
-            </a:r>
-          </a:p>
-        </p:txBody>
-      </p:sp>
-      <p:sp>
-        <p:nvSpPr>
-          <p:cNvPr id="3" name="Content Placeholder 2">
-            <a:extLst>
-              <a:ext uri="{FF2B5EF4-FFF2-40B4-BE49-F238E27FC236}">
-                <a16:creationId xmlns:a16="http://schemas.microsoft.com/office/drawing/2014/main" id="{4773AD08-6397-4F8B-3513-5231FFBDE7E5}"/>
-              </a:ext>
-            </a:extLst>
-          </p:cNvPr>
-          <p:cNvSpPr>
-            <a:spLocks noGrp="1"/>
-          </p:cNvSpPr>
-          <p:nvPr>
-            <p:ph idx="1"/>
-          </p:nvPr>
-        </p:nvSpPr>
-        <p:spPr>
-          <a:xfrm>
-            <a:off x="838200" y="1563158"/>
-            <a:ext cx="4978400" cy="4351338"/>
-          </a:xfrm>
-        </p:spPr>
-        <p:txBody>
-          <a:bodyPr>
-            <a:normAutofit/>
-          </a:bodyPr>
-          <a:lstStyle/>
-          <a:p>
-            <a:pPr marL="0" indent="0">
-              <a:buNone/>
-            </a:pPr>
-            <a:r>
-              <a:rPr lang="en-US" sz="2400" i="1" dirty="0"/>
-              <a:t>Type answer here</a:t>
-            </a:r>
-          </a:p>
-        </p:txBody>
-      </p:sp>
-      <p:sp>
-        <p:nvSpPr>
-          <p:cNvPr id="4" name="Content Placeholder 2">
-            <a:extLst>
-              <a:ext uri="{FF2B5EF4-FFF2-40B4-BE49-F238E27FC236}">
-                <a16:creationId xmlns:a16="http://schemas.microsoft.com/office/drawing/2014/main" id="{67553AFD-0E65-CF76-D6B2-11BAE799E06B}"/>
-              </a:ext>
-            </a:extLst>
-          </p:cNvPr>
-          <p:cNvSpPr txBox="1">
-            <a:spLocks/>
-          </p:cNvSpPr>
-          <p:nvPr/>
-        </p:nvSpPr>
-        <p:spPr>
-          <a:xfrm>
-            <a:off x="6375400" y="1563158"/>
-            <a:ext cx="4978400" cy="4351338"/>
-          </a:xfrm>
-          <a:prstGeom prst="rect">
-            <a:avLst/>
-          </a:prstGeom>
-        </p:spPr>
-        <p:txBody>
-          <a:bodyPr vert="horz" lIns="91440" tIns="45720" rIns="91440" bIns="45720" rtlCol="0">
-            <a:normAutofit/>
-          </a:bodyPr>
-          <a:lstStyle>
-            <a:lvl1pPr marL="228600" indent="-228600" algn="l" defTabSz="914400" rtl="0" eaLnBrk="1" latinLnBrk="0" hangingPunct="1">
-              <a:lnSpc>
-                <a:spcPct val="90000"/>
-              </a:lnSpc>
-              <a:spcBef>
-                <a:spcPts val="1000"/>
-              </a:spcBef>
-              <a:buFont typeface="Arial" panose="020B0604020202020204" pitchFamily="34" charset="0"/>
-              <a:buChar char="•"/>
-              <a:defRPr sz="2800" kern="1200">
-                <a:solidFill>
-                  <a:schemeClr val="tx1"/>
-                </a:solidFill>
-                <a:latin typeface="+mn-lt"/>
-                <a:ea typeface="+mn-ea"/>
-                <a:cs typeface="+mn-cs"/>
-              </a:defRPr>
-            </a:lvl1pPr>
-            <a:lvl2pPr marL="685800" indent="-228600" algn="l" defTabSz="914400" rtl="0" eaLnBrk="1" latinLnBrk="0" hangingPunct="1">
-              <a:lnSpc>
-                <a:spcPct val="90000"/>
-              </a:lnSpc>
-              <a:spcBef>
-                <a:spcPts val="500"/>
-              </a:spcBef>
-              <a:buFont typeface="Arial" panose="020B0604020202020204" pitchFamily="34" charset="0"/>
-              <a:buChar char="•"/>
-              <a:defRPr sz="2400" kern="1200">
-                <a:solidFill>
-                  <a:schemeClr val="tx1"/>
-                </a:solidFill>
-                <a:latin typeface="+mn-lt"/>
-                <a:ea typeface="+mn-ea"/>
-                <a:cs typeface="+mn-cs"/>
-              </a:defRPr>
-            </a:lvl2pPr>
-            <a:lvl3pPr marL="1143000" indent="-228600" algn="l" defTabSz="914400" rtl="0" eaLnBrk="1" latinLnBrk="0" hangingPunct="1">
-              <a:lnSpc>
-                <a:spcPct val="90000"/>
-              </a:lnSpc>
-              <a:spcBef>
-                <a:spcPts val="500"/>
-              </a:spcBef>
-              <a:buFont typeface="Arial" panose="020B0604020202020204" pitchFamily="34" charset="0"/>
-              <a:buChar char="•"/>
-              <a:defRPr sz="2000" kern="1200">
-                <a:solidFill>
-                  <a:schemeClr val="tx1"/>
-                </a:solidFill>
-                <a:latin typeface="+mn-lt"/>
-                <a:ea typeface="+mn-ea"/>
-                <a:cs typeface="+mn-cs"/>
-              </a:defRPr>
-            </a:lvl3pPr>
-            <a:lvl4pPr marL="1600200" indent="-228600" algn="l" defTabSz="914400" rtl="0" eaLnBrk="1" latinLnBrk="0" hangingPunct="1">
-              <a:lnSpc>
-                <a:spcPct val="90000"/>
-              </a:lnSpc>
-              <a:spcBef>
-                <a:spcPts val="500"/>
-              </a:spcBef>
-              <a:buFont typeface="Arial" panose="020B0604020202020204" pitchFamily="34" charset="0"/>
-              <a:buChar char="•"/>
-              <a:defRPr sz="1800" kern="1200">
-                <a:solidFill>
-                  <a:schemeClr val="tx1"/>
-                </a:solidFill>
-                <a:latin typeface="+mn-lt"/>
-                <a:ea typeface="+mn-ea"/>
-                <a:cs typeface="+mn-cs"/>
-              </a:defRPr>
-            </a:lvl4pPr>
-            <a:lvl5pPr marL="2057400" indent="-228600" algn="l" defTabSz="914400" rtl="0" eaLnBrk="1" latinLnBrk="0" hangingPunct="1">
-              <a:lnSpc>
-                <a:spcPct val="90000"/>
-              </a:lnSpc>
-              <a:spcBef>
-                <a:spcPts val="500"/>
-              </a:spcBef>
-              <a:buFont typeface="Arial" panose="020B0604020202020204" pitchFamily="34" charset="0"/>
-              <a:buChar char="•"/>
-              <a:defRPr sz="1800" kern="1200">
-                <a:solidFill>
-                  <a:schemeClr val="tx1"/>
-                </a:solidFill>
-                <a:latin typeface="+mn-lt"/>
-                <a:ea typeface="+mn-ea"/>
-                <a:cs typeface="+mn-cs"/>
-              </a:defRPr>
-            </a:lvl5pPr>
-            <a:lvl6pPr marL="2514600" indent="-228600" algn="l" defTabSz="914400" rtl="0" eaLnBrk="1" latinLnBrk="0" hangingPunct="1">
-              <a:lnSpc>
-                <a:spcPct val="90000"/>
-              </a:lnSpc>
-              <a:spcBef>
-                <a:spcPts val="500"/>
-              </a:spcBef>
-              <a:buFont typeface="Arial" panose="020B0604020202020204" pitchFamily="34" charset="0"/>
-              <a:buChar char="•"/>
-              <a:defRPr sz="1800" kern="1200">
-                <a:solidFill>
-                  <a:schemeClr val="tx1"/>
-                </a:solidFill>
-                <a:latin typeface="+mn-lt"/>
-                <a:ea typeface="+mn-ea"/>
-                <a:cs typeface="+mn-cs"/>
-              </a:defRPr>
-            </a:lvl6pPr>
-            <a:lvl7pPr marL="2971800" indent="-228600" algn="l" defTabSz="914400" rtl="0" eaLnBrk="1" latinLnBrk="0" hangingPunct="1">
-              <a:lnSpc>
-                <a:spcPct val="90000"/>
-              </a:lnSpc>
-              <a:spcBef>
-                <a:spcPts val="500"/>
-              </a:spcBef>
-              <a:buFont typeface="Arial" panose="020B0604020202020204" pitchFamily="34" charset="0"/>
-              <a:buChar char="•"/>
-              <a:defRPr sz="1800" kern="1200">
-                <a:solidFill>
-                  <a:schemeClr val="tx1"/>
-                </a:solidFill>
-                <a:latin typeface="+mn-lt"/>
-                <a:ea typeface="+mn-ea"/>
-                <a:cs typeface="+mn-cs"/>
-              </a:defRPr>
-            </a:lvl7pPr>
-            <a:lvl8pPr marL="3429000" indent="-228600" algn="l" defTabSz="914400" rtl="0" eaLnBrk="1" latinLnBrk="0" hangingPunct="1">
-              <a:lnSpc>
-                <a:spcPct val="90000"/>
-              </a:lnSpc>
-              <a:spcBef>
-                <a:spcPts val="500"/>
-              </a:spcBef>
-              <a:buFont typeface="Arial" panose="020B0604020202020204" pitchFamily="34" charset="0"/>
-              <a:buChar char="•"/>
-              <a:defRPr sz="1800" kern="1200">
-                <a:solidFill>
-                  <a:schemeClr val="tx1"/>
-                </a:solidFill>
-                <a:latin typeface="+mn-lt"/>
-                <a:ea typeface="+mn-ea"/>
-                <a:cs typeface="+mn-cs"/>
-              </a:defRPr>
-            </a:lvl8pPr>
-            <a:lvl9pPr marL="3886200" indent="-228600" algn="l" defTabSz="914400" rtl="0" eaLnBrk="1" latinLnBrk="0" hangingPunct="1">
-              <a:lnSpc>
-                <a:spcPct val="90000"/>
-              </a:lnSpc>
-              <a:spcBef>
-                <a:spcPts val="500"/>
-              </a:spcBef>
-              <a:buFont typeface="Arial" panose="020B0604020202020204" pitchFamily="34" charset="0"/>
-              <a:buChar char="•"/>
-              <a:defRPr sz="1800" kern="1200">
-                <a:solidFill>
-                  <a:schemeClr val="tx1"/>
-                </a:solidFill>
-                <a:latin typeface="+mn-lt"/>
-                <a:ea typeface="+mn-ea"/>
-                <a:cs typeface="+mn-cs"/>
-              </a:defRPr>
-            </a:lvl9pPr>
-          </a:lstStyle>
-          <a:p>
-            <a:pPr marL="0" indent="0">
-              <a:buFont typeface="Arial" panose="020B0604020202020204" pitchFamily="34" charset="0"/>
-              <a:buNone/>
-            </a:pPr>
-            <a:r>
-              <a:rPr lang="en-US" sz="2400" i="1" dirty="0"/>
-              <a:t>Paste screenshot here</a:t>
-            </a:r>
-          </a:p>
-        </p:txBody>
-      </p:sp>
-      <p:sp>
-        <p:nvSpPr>
-          <p:cNvPr id="5" name="TextBox 4">
-            <a:extLst>
-              <a:ext uri="{FF2B5EF4-FFF2-40B4-BE49-F238E27FC236}">
-                <a16:creationId xmlns:a16="http://schemas.microsoft.com/office/drawing/2014/main" id="{D7D350C8-2C1A-2D65-0B55-598A86259B68}"/>
-              </a:ext>
-            </a:extLst>
-          </p:cNvPr>
-          <p:cNvSpPr txBox="1"/>
-          <p:nvPr/>
-        </p:nvSpPr>
-        <p:spPr>
-          <a:xfrm>
-            <a:off x="734222" y="6162986"/>
-            <a:ext cx="11011422" cy="646331"/>
-          </a:xfrm>
-          <a:prstGeom prst="rect">
-            <a:avLst/>
-          </a:prstGeom>
-          <a:noFill/>
-        </p:spPr>
-        <p:txBody>
-          <a:bodyPr wrap="square" rtlCol="0">
-            <a:spAutoFit/>
-          </a:bodyPr>
-          <a:lstStyle/>
-          <a:p>
-            <a:r>
-              <a:rPr lang="en-US" dirty="0"/>
-              <a:t>*Reflect on the limits of calling this pipeline “SLAM.” Is it more precise to call it LiDAR-inertial odometry, SLAM, or a hybrid? Consider the presence or absence of loop closure, global consistency, and mapping behavior.</a:t>
-            </a:r>
-          </a:p>
-        </p:txBody>
-      </p:sp>
+      </p:pic>
     </p:spTree>
     <p:extLst>
       <p:ext uri="{BB962C8B-B14F-4D97-AF65-F5344CB8AC3E}">
